--- a/5-DATA_FUTURE_NEXT_GEN/5-Data-Future-Next-Gen.pptx
+++ b/5-DATA_FUTURE_NEXT_GEN/5-Data-Future-Next-Gen.pptx
@@ -160,7 +160,7 @@
           <a:bodyPr vert="horz" lIns="91440" tIns="45720" rIns="91440" bIns="45720" rtlCol="0"/>
           <a:lstStyle>
             <a:lvl1pPr algn="l">
-              <a:defRPr sz="1200"/>
+              <a:defRPr sz="4200"/>
             </a:lvl1pPr>
           </a:lstStyle>
           <a:p>
@@ -191,7 +191,7 @@
           <a:bodyPr vert="horz" lIns="91440" tIns="45720" rIns="91440" bIns="45720" rtlCol="0"/>
           <a:lstStyle>
             <a:lvl1pPr algn="r">
-              <a:defRPr sz="1200"/>
+              <a:defRPr sz="4200"/>
             </a:lvl1pPr>
           </a:lstStyle>
           <a:p>
@@ -318,7 +318,7 @@
           <a:bodyPr vert="horz" lIns="91440" tIns="45720" rIns="91440" bIns="45720" rtlCol="0" anchor="b"/>
           <a:lstStyle>
             <a:lvl1pPr algn="l">
-              <a:defRPr sz="1200"/>
+              <a:defRPr sz="4200"/>
             </a:lvl1pPr>
           </a:lstStyle>
           <a:p>
@@ -349,7 +349,7 @@
           <a:bodyPr vert="horz" lIns="91440" tIns="45720" rIns="91440" bIns="45720" rtlCol="0" anchor="b"/>
           <a:lstStyle>
             <a:lvl1pPr algn="r">
-              <a:defRPr sz="1200"/>
+              <a:defRPr sz="4200"/>
             </a:lvl1pPr>
           </a:lstStyle>
           <a:p>
@@ -371,7 +371,7 @@
   <p:clrMap bg1="lt1" tx1="dk1" bg2="lt2" tx2="dk2" accent1="accent1" accent2="accent2" accent3="accent3" accent4="accent4" accent5="accent5" accent6="accent6" hlink="hlink" folHlink="folHlink"/>
   <p:notesStyle>
     <a:lvl1pPr marL="0" algn="l" defTabSz="914400" rtl="0" eaLnBrk="1" latinLnBrk="0" hangingPunct="1">
-      <a:defRPr sz="1200" kern="1200">
+      <a:defRPr sz="4200" kern="1200">
         <a:solidFill>
           <a:schemeClr val="tx1"/>
         </a:solidFill>
@@ -381,7 +381,7 @@
       </a:defRPr>
     </a:lvl1pPr>
     <a:lvl2pPr marL="457200" algn="l" defTabSz="914400" rtl="0" eaLnBrk="1" latinLnBrk="0" hangingPunct="1">
-      <a:defRPr sz="1200" kern="1200">
+      <a:defRPr sz="4200" kern="1200">
         <a:solidFill>
           <a:schemeClr val="tx1"/>
         </a:solidFill>
@@ -391,7 +391,7 @@
       </a:defRPr>
     </a:lvl2pPr>
     <a:lvl3pPr marL="914400" algn="l" defTabSz="914400" rtl="0" eaLnBrk="1" latinLnBrk="0" hangingPunct="1">
-      <a:defRPr sz="1200" kern="1200">
+      <a:defRPr sz="4200" kern="1200">
         <a:solidFill>
           <a:schemeClr val="tx1"/>
         </a:solidFill>
@@ -401,7 +401,7 @@
       </a:defRPr>
     </a:lvl3pPr>
     <a:lvl4pPr marL="1371600" algn="l" defTabSz="914400" rtl="0" eaLnBrk="1" latinLnBrk="0" hangingPunct="1">
-      <a:defRPr sz="1200" kern="1200">
+      <a:defRPr sz="4200" kern="1200">
         <a:solidFill>
           <a:schemeClr val="tx1"/>
         </a:solidFill>
@@ -411,7 +411,7 @@
       </a:defRPr>
     </a:lvl4pPr>
     <a:lvl5pPr marL="1828800" algn="l" defTabSz="914400" rtl="0" eaLnBrk="1" latinLnBrk="0" hangingPunct="1">
-      <a:defRPr sz="1200" kern="1200">
+      <a:defRPr sz="4200" kern="1200">
         <a:solidFill>
           <a:schemeClr val="tx1"/>
         </a:solidFill>
@@ -421,7 +421,7 @@
       </a:defRPr>
     </a:lvl5pPr>
     <a:lvl6pPr marL="2286000" algn="l" defTabSz="914400" rtl="0" eaLnBrk="1" latinLnBrk="0" hangingPunct="1">
-      <a:defRPr sz="1200" kern="1200">
+      <a:defRPr sz="4200" kern="1200">
         <a:solidFill>
           <a:schemeClr val="tx1"/>
         </a:solidFill>
@@ -431,7 +431,7 @@
       </a:defRPr>
     </a:lvl6pPr>
     <a:lvl7pPr marL="2743200" algn="l" defTabSz="914400" rtl="0" eaLnBrk="1" latinLnBrk="0" hangingPunct="1">
-      <a:defRPr sz="1200" kern="1200">
+      <a:defRPr sz="4200" kern="1200">
         <a:solidFill>
           <a:schemeClr val="tx1"/>
         </a:solidFill>
@@ -441,7 +441,7 @@
       </a:defRPr>
     </a:lvl7pPr>
     <a:lvl8pPr marL="3200400" algn="l" defTabSz="914400" rtl="0" eaLnBrk="1" latinLnBrk="0" hangingPunct="1">
-      <a:defRPr sz="1200" kern="1200">
+      <a:defRPr sz="4200" kern="1200">
         <a:solidFill>
           <a:schemeClr val="tx1"/>
         </a:solidFill>
@@ -451,7 +451,7 @@
       </a:defRPr>
     </a:lvl8pPr>
     <a:lvl9pPr marL="3657600" algn="l" defTabSz="914400" rtl="0" eaLnBrk="1" latinLnBrk="0" hangingPunct="1">
-      <a:defRPr sz="1200" kern="1200">
+      <a:defRPr sz="4200" kern="1200">
         <a:solidFill>
           <a:schemeClr val="tx1"/>
         </a:solidFill>
@@ -509,10 +509,27 @@
           <a:lstStyle/>
           <a:p>
             <a:r>
-              <a:rPr lang="en-US" dirty="0"/>
-              <a:t/>
-            </a:r>
-            <a:endParaRPr lang="en-US" dirty="0"/>
+              <a:rPr sz="4200"/>
+              <a:t>TITLE SLIDE</a:t>
+            </a:r>
+          </a:p>
+          <a:p>
+            <a:r>
+              <a:rPr sz="4200"/>
+              <a:t>"Data, the Future, the Next Generation"</a:t>
+            </a:r>
+          </a:p>
+          <a:p>
+            <a:r>
+              <a:rPr sz="4200"/>
+              <a:t>Presentation 5 of 5. 3:00-3:30 PM. Duration: 30 minutes (followed by 30 min closing Q&amp;A).</a:t>
+            </a:r>
+          </a:p>
+          <a:p>
+            <a:r>
+              <a:rPr sz="4200"/>
+              <a:t>Format: No slides planned originally. Conversational closer. Maybe one or two images.</a:t>
+            </a:r>
           </a:p>
         </p:txBody>
       </p:sp>
@@ -597,10 +614,45 @@
           <a:lstStyle/>
           <a:p>
             <a:r>
-              <a:rPr lang="en-US" dirty="0"/>
-              <a:t/>
-            </a:r>
-            <a:endParaRPr lang="en-US" dirty="0"/>
+              <a:rPr sz="4200"/>
+              <a:t>THE DAY IN ONE BREATH (3 min)</a:t>
+            </a:r>
+          </a:p>
+          <a:p>
+            <a:r>
+              <a:rPr sz="4200"/>
+              <a:t>No re-teaching. Just name what happened so the audience feels the arc.</a:t>
+            </a:r>
+          </a:p>
+          <a:p>
+            <a:r>
+              <a:rPr sz="4200"/>
+              <a:t>- This morning: the field is broken, and the pattern that keeps it broken is ancient and biological. Not anyone's fault. But recognizable.</a:t>
+            </a:r>
+          </a:p>
+          <a:p>
+            <a:r>
+              <a:rPr sz="4200"/>
+              <a:t>- Then: a minimal framework—four variables—that gives us something to measure and agree on.</a:t>
+            </a:r>
+          </a:p>
+          <a:p>
+            <a:r>
+              <a:rPr sz="4200"/>
+              <a:t>- Then: how to actually research it. Ground truth set by humans, scaled by machines.</a:t>
+            </a:r>
+          </a:p>
+          <a:p>
+            <a:r>
+              <a:rPr sz="4200"/>
+              <a:t>- This afternoon: the tool, live. Laura showed you what it looks like in a real case.</a:t>
+            </a:r>
+          </a:p>
+          <a:p>
+            <a:r>
+              <a:rPr sz="4200"/>
+              <a:t>- Now: what does all of this add up to?</a:t>
+            </a:r>
           </a:p>
         </p:txBody>
       </p:sp>
@@ -685,10 +737,51 @@
           <a:lstStyle/>
           <a:p>
             <a:r>
-              <a:rPr lang="en-US" dirty="0"/>
-              <a:t/>
-            </a:r>
-            <a:endParaRPr lang="en-US" dirty="0"/>
+              <a:rPr sz="4200"/>
+              <a:t>WHERE WE ARE RIGHT NOW (3 min)</a:t>
+            </a:r>
+          </a:p>
+          <a:p>
+            <a:r>
+              <a:rPr sz="4200"/>
+              <a:t>Honest inventory. No inflation.</a:t>
+            </a:r>
+          </a:p>
+          <a:p>
+            <a:r>
+              <a:rPr sz="4200"/>
+              <a:t>- A data model (SARF) minimal enough to test and rich enough to capture what matters</a:t>
+            </a:r>
+          </a:p>
+          <a:p>
+            <a:r>
+              <a:rPr sz="4200"/>
+              <a:t>- A research pipeline (IRR → AI) that we built and are using</a:t>
+            </a:r>
+          </a:p>
+          <a:p>
+            <a:r>
+              <a:rPr sz="4200"/>
+              <a:t>- Software tools already in clinicians' hands</a:t>
+            </a:r>
+          </a:p>
+          <a:p>
+            <a:r>
+              <a:rPr sz="4200"/>
+              <a:t>- A small working group of people who showed up</a:t>
+            </a:r>
+          </a:p>
+          <a:p>
+            <a:r>
+              <a:rPr sz="4200"/>
+              <a:t>- Early stage. Real. Functional. None of this is anyone's day job—yet.</a:t>
+            </a:r>
+          </a:p>
+          <a:p>
+            <a:r>
+              <a:rPr sz="4200"/>
+              <a:t>"This is not a pitch deck. This is what exists today."</a:t>
+            </a:r>
           </a:p>
         </p:txBody>
       </p:sp>
@@ -773,10 +866,52 @@
           <a:lstStyle/>
           <a:p>
             <a:r>
-              <a:rPr lang="en-US" dirty="0"/>
-              <a:t/>
-            </a:r>
-            <a:endParaRPr lang="en-US" dirty="0"/>
+              <a:rPr sz="4200"/>
+              <a:t>WHAT BECOMES POSSIBLE: THE DATA STARTS TO COMPOUND (6 min)</a:t>
+            </a:r>
+          </a:p>
+          <a:p>
+            <a:r>
+              <a:rPr sz="4200"/>
+              <a:t>Right now, every clinician is an island. Their observations die with their caseload.</a:t>
+            </a:r>
+          </a:p>
+          <a:p>
+            <a:r>
+              <a:rPr sz="4200"/>
+              <a:t>With shared variables, observations accumulate across practitioners. Knowledge compounds.</a:t>
+            </a:r>
+          </a:p>
+          <a:p>
+            <a:r>
+              <a:rPr sz="4200"/>
+              <a:t>A trainee in Brazil and a trainee in Alaska evaluate the same case and get comparable results—not because they were taught the same opinions, but because they're looking at the same variables.</a:t>
+            </a:r>
+          </a:p>
+          <a:p/>
+          <a:p>
+            <a:r>
+              <a:rPr sz="4200"/>
+              <a:t>THE AI ENTERS ERA 2:</a:t>
+            </a:r>
+          </a:p>
+          <a:p>
+            <a:r>
+              <a:rPr sz="4200"/>
+              <a:t>Era 1: AI learns from humans. That's where we are now.</a:t>
+            </a:r>
+          </a:p>
+          <a:p>
+            <a:r>
+              <a:rPr sz="4200"/>
+              <a:t>Era 2 follows when enough ground truth accumulates: AI finds patterns humans couldn't see. New hypotheses for humans to test.</a:t>
+            </a:r>
+          </a:p>
+          <a:p>
+            <a:r>
+              <a:rPr sz="4200"/>
+              <a:t>The human remains central—setting the standard, correcting the machine, deciding what matters.</a:t>
+            </a:r>
           </a:p>
         </p:txBody>
       </p:sp>
@@ -861,10 +996,57 @@
           <a:lstStyle/>
           <a:p>
             <a:r>
-              <a:rPr lang="en-US" dirty="0"/>
-              <a:t/>
-            </a:r>
-            <a:endParaRPr lang="en-US" dirty="0"/>
+              <a:rPr sz="4200"/>
+              <a:t>THE THINKING SPREADS</a:t>
+            </a:r>
+          </a:p>
+          <a:p>
+            <a:r>
+              <a:rPr sz="4200"/>
+              <a:t>This is the part that excites me most.</a:t>
+            </a:r>
+          </a:p>
+          <a:p>
+            <a:r>
+              <a:rPr sz="4200"/>
+              <a:t>The act of coding a case—sitting down and asking "what shifted, when, and in relation to what?"—changes how you think. Every person in the working group has reported this.</a:t>
+            </a:r>
+          </a:p>
+          <a:p>
+            <a:r>
+              <a:rPr sz="4200"/>
+              <a:t>It's not a one-time insight. It's a practice. The more you do it, the clearer you get about each case.</a:t>
+            </a:r>
+          </a:p>
+          <a:p>
+            <a:r>
+              <a:rPr sz="4200"/>
+              <a:t>A clinician with a clear mental model of the family makes better decisions—what to ask, what to leave alone, when something has shifted.</a:t>
+            </a:r>
+          </a:p>
+          <a:p>
+            <a:r>
+              <a:rPr sz="4200"/>
+              <a:t>A clinician without one is navigating by feel, and feel is unreliable when anxiety is high.</a:t>
+            </a:r>
+          </a:p>
+          <a:p>
+            <a:r>
+              <a:rPr sz="4200"/>
+              <a:t>You don't need software to do it. You need a pencil and a timeline.</a:t>
+            </a:r>
+          </a:p>
+          <a:p>
+            <a:r>
+              <a:rPr sz="4200"/>
+              <a:t>Once you start thinking this way—tracking shifts instead of labeling states—you start seeing process everywhere. In your cases, in your own family, in the news.</a:t>
+            </a:r>
+          </a:p>
+          <a:p>
+            <a:r>
+              <a:rPr sz="4200"/>
+              <a:t>"That's not a technology. That's a way of using your mind."</a:t>
+            </a:r>
           </a:p>
         </p:txBody>
       </p:sp>
@@ -949,10 +1131,21 @@
           <a:lstStyle/>
           <a:p>
             <a:r>
-              <a:rPr lang="en-US" dirty="0"/>
-              <a:t/>
-            </a:r>
-            <a:endParaRPr lang="en-US" dirty="0"/>
+              <a:rPr sz="4200"/>
+              <a:t>THE NEXT GENERATION (6 min)</a:t>
+            </a:r>
+          </a:p>
+          <a:p>
+            <a:r>
+              <a:rPr sz="4200"/>
+              <a:t>Deliver on Pres 3's promise: "More on this at day's end."</a:t>
+            </a:r>
+          </a:p>
+          <a:p>
+            <a:r>
+              <a:rPr sz="4200"/>
+              <a:t>You don't have to be an engineer. This work needs people at every level, and most are clinical, not technical.</a:t>
+            </a:r>
           </a:p>
         </p:txBody>
       </p:sp>
@@ -1037,10 +1230,40 @@
           <a:lstStyle/>
           <a:p>
             <a:r>
-              <a:rPr lang="en-US" dirty="0"/>
-              <a:t/>
-            </a:r>
-            <a:endParaRPr lang="en-US" dirty="0"/>
+              <a:rPr sz="4200"/>
+              <a:t>FOUR WAYS IN</a:t>
+            </a:r>
+          </a:p>
+          <a:p>
+            <a:r>
+              <a:rPr sz="4200"/>
+              <a:t>1. Start with your own thinking: Before your next intake, draw the family. Put dates on the shifts. See what sequence emerges. A whiteboard works. The app just remembers for you.</a:t>
+            </a:r>
+          </a:p>
+          <a:p>
+            <a:r>
+              <a:rPr sz="4200"/>
+              <a:t>2. Use the tools: Pro app available now. Personal app coming—clients generate their own assessment.</a:t>
+            </a:r>
+          </a:p>
+          <a:p>
+            <a:r>
+              <a:rPr sz="4200"/>
+              <a:t>3. Join the seminar: Monthly Zoom. Clinicians using the app, coding cases, sharpening thinking. Not a lecture series. A working group.</a:t>
+            </a:r>
+          </a:p>
+          <a:p>
+            <a:r>
+              <a:rPr sz="4200"/>
+              <a:t>4. Code cases for the IRR study: The study needs trained coders. That's clinicians. You listen to a case, code it using SARF, your coding gets compared to others. This is the ground truth pipeline. You are the humans.</a:t>
+            </a:r>
+          </a:p>
+          <a:p/>
+          <a:p>
+            <a:r>
+              <a:rPr sz="4200"/>
+              <a:t>Bring your observations: You see patterns no one else sees. SARF gives you a way to record them so they can be tested. That's how science works.</a:t>
+            </a:r>
           </a:p>
         </p:txBody>
       </p:sp>
@@ -1125,10 +1348,45 @@
           <a:lstStyle/>
           <a:p>
             <a:r>
-              <a:rPr lang="en-US" dirty="0"/>
-              <a:t/>
-            </a:r>
-            <a:endParaRPr lang="en-US" dirty="0"/>
+              <a:rPr sz="4200"/>
+              <a:t>CLOSE (2 min)</a:t>
+            </a:r>
+          </a:p>
+          <a:p>
+            <a:r>
+              <a:rPr sz="4200"/>
+              <a:t>Quiet conviction. Long view. The adventure.</a:t>
+            </a:r>
+          </a:p>
+          <a:p>
+            <a:r>
+              <a:rPr sz="4200"/>
+              <a:t>"This morning I told you the field is broken. That's true. But it's not hopeless—it's unmeasured. And unmeasured is fixable."</a:t>
+            </a:r>
+          </a:p>
+          <a:p>
+            <a:r>
+              <a:rPr sz="4200"/>
+              <a:t>"The human brain will not stop trying to understand itself. That's not optimism—that's just what brains do."</a:t>
+            </a:r>
+          </a:p>
+          <a:p>
+            <a:r>
+              <a:rPr sz="4200"/>
+              <a:t>"Everything we talked about today—the data model, the research method, the tools—none of it existed five years ago. All of it exists now. All of it works."</a:t>
+            </a:r>
+          </a:p>
+          <a:p>
+            <a:r>
+              <a:rPr sz="4200"/>
+              <a:t>"The next generation of this work isn't a technology. It's a way of thinking—looking at the family, recording what you see, and letting your observations be tested. You can start that on Monday."</a:t>
+            </a:r>
+          </a:p>
+          <a:p>
+            <a:r>
+              <a:rPr sz="4200"/>
+              <a:t>"Thank you for spending the day."</a:t>
+            </a:r>
           </a:p>
         </p:txBody>
       </p:sp>
@@ -1213,10 +1471,52 @@
           <a:lstStyle/>
           <a:p>
             <a:r>
-              <a:rPr lang="en-US" dirty="0"/>
-              <a:t/>
-            </a:r>
-            <a:endParaRPr lang="en-US" dirty="0"/>
+              <a:rPr sz="4200"/>
+              <a:t>CLOSING SLIDE</a:t>
+            </a:r>
+          </a:p>
+          <a:p>
+            <a:r>
+              <a:rPr sz="4200"/>
+              <a:t>alaskafamilysystems.com</a:t>
+            </a:r>
+          </a:p>
+          <a:p>
+            <a:r>
+              <a:rPr sz="4200"/>
+              <a:t>Dr. Patrick Stinson</a:t>
+            </a:r>
+          </a:p>
+          <a:p/>
+          <a:p>
+            <a:r>
+              <a:rPr sz="4200"/>
+              <a:t>RISKS TO WATCH:</a:t>
+            </a:r>
+          </a:p>
+          <a:p>
+            <a:r>
+              <a:rPr sz="4200"/>
+              <a:t>- Redundancy with Pres 3: this version centers on experience of thinking differently, not institutional outcomes</a:t>
+            </a:r>
+          </a:p>
+          <a:p>
+            <a:r>
+              <a:rPr sz="4200"/>
+              <a:t>- Fatigue: 3 PM after a full day. Keep short, no new concepts, emotionally warm, done in 20 min.</a:t>
+            </a:r>
+          </a:p>
+          <a:p>
+            <a:r>
+              <a:rPr sz="4200"/>
+              <a:t>- Pitch-y: tools are secondary to the "start thinking this way" message</a:t>
+            </a:r>
+          </a:p>
+          <a:p>
+            <a:r>
+              <a:rPr sz="4200"/>
+              <a:t>- Too soft: four specific things to do (think, use tools, join seminar, code cases)</a:t>
+            </a:r>
           </a:p>
         </p:txBody>
       </p:sp>

--- a/5-DATA_FUTURE_NEXT_GEN/5-Data-Future-Next-Gen.pptx
+++ b/5-DATA_FUTURE_NEXT_GEN/5-Data-Future-Next-Gen.pptx
@@ -876,12 +876,29 @@
           <a:p>
             <a:r>
               <a:rPr sz="4200"/>
+              <a:t>Carl Sagan — American astronomer, astrophysicist, and science communicator (1934–1996)</a:t>
+            </a:r>
+          </a:p>
+          <a:p>
+            <a:r>
+              <a:rPr sz="4200"/>
+              <a:t>Richard Feynman — American theoretical physicist, Nobel laureate (1918–1988)</a:t>
+            </a:r>
+          </a:p>
+          <a:p>
+            <a:r>
+              <a:rPr sz="4200"/>
+              <a:t>Murray Bowen — American psychiatrist, founder of family systems theory (1913–1990)</a:t>
+            </a:r>
+          </a:p>
+          <a:p/>
+          <a:p>
+            <a:r>
+              <a:rPr sz="4200"/>
               <a:t>THE POSTURE</a:t>
             </a:r>
           </a:p>
-          <a:p>
-            <a:endParaRPr sz="4200"/>
-          </a:p>
+          <a:p/>
           <a:p>
             <a:r>
               <a:rPr sz="4200"/>
@@ -900,18 +917,14 @@
               <a:t>Bowen spent 40 years pursuing a science of human behavior — a goal "generally considered to be unattainable." At the end of his career he wrote about the human probing the secrets of the universe, sending himself to the moon on theory alone. Then turning inward: we have "hardly scratched the surface" of the space inside our own skulls. "The development of the human brain will not permit him to stop."</a:t>
             </a:r>
           </a:p>
-          <a:p>
-            <a:endParaRPr sz="4200"/>
-          </a:p>
+          <a:p/>
           <a:p>
             <a:r>
               <a:rPr sz="4200"/>
               <a:t>These are people who found the act of discovery itself to be the reward. Not the specific concepts they landed on — the posture. The future is limitless. There is still so much to discover.</a:t>
             </a:r>
           </a:p>
-          <a:p>
-            <a:endParaRPr sz="4200"/>
-          </a:p>
+          <a:p/>
           <a:p>
             <a:r>
               <a:rPr sz="4200"/>
@@ -2519,7 +2532,7 @@
                 <a:ea typeface="Calibri" pitchFamily="34" charset="-122"/>
                 <a:cs typeface="Calibri" pitchFamily="34" charset="-120"/>
               </a:rPr>
-              <a:t>Not just a technology. A way of using your mind.</a:t>
+              <a:t>Not a technology. A way of using your mind.</a:t>
             </a:r>
             <a:endParaRPr lang="en-US" sz="1800" dirty="0"/>
           </a:p>
